--- a/презентация.pptx
+++ b/презентация.pptx
@@ -235,7 +235,7 @@
             <a:fld id="{15504EF5-1B61-4C08-BFDD-5C0D5AF73FD4}" type="datetimeFigureOut">
               <a:rPr lang="ru-RU" smtClean="0"/>
               <a:pPr/>
-              <a:t>27.04.2026</a:t>
+              <a:t>30.04.2026</a:t>
             </a:fld>
             <a:endParaRPr lang="ru-RU" dirty="0"/>
           </a:p>
@@ -702,7 +702,7 @@
                 </a:solidFill>
               </a:rPr>
               <a:pPr/>
-              <a:t>27.04.2026</a:t>
+              <a:t>30.04.2026</a:t>
             </a:fld>
             <a:endParaRPr lang="ru-RU">
               <a:solidFill>
@@ -1085,7 +1085,7 @@
                 </a:solidFill>
               </a:rPr>
               <a:pPr defTabSz="1794047"/>
-              <a:t>27.04.2026</a:t>
+              <a:t>30.04.2026</a:t>
             </a:fld>
             <a:endParaRPr lang="ru-RU">
               <a:solidFill>
@@ -1521,7 +1521,7 @@
                 </a:solidFill>
               </a:rPr>
               <a:pPr defTabSz="1794047"/>
-              <a:t>27.04.2026</a:t>
+              <a:t>30.04.2026</a:t>
             </a:fld>
             <a:endParaRPr lang="ru-RU">
               <a:solidFill>
@@ -1892,7 +1892,7 @@
                 </a:solidFill>
               </a:rPr>
               <a:pPr defTabSz="1794047"/>
-              <a:t>27.04.2026</a:t>
+              <a:t>30.04.2026</a:t>
             </a:fld>
             <a:endParaRPr lang="ru-RU">
               <a:solidFill>
@@ -2247,7 +2247,7 @@
                 </a:solidFill>
               </a:rPr>
               <a:pPr defTabSz="1794047"/>
-              <a:t>27.04.2026</a:t>
+              <a:t>30.04.2026</a:t>
             </a:fld>
             <a:endParaRPr lang="ru-RU">
               <a:solidFill>
@@ -2678,7 +2678,7 @@
                 </a:solidFill>
               </a:rPr>
               <a:pPr defTabSz="1794047"/>
-              <a:t>27.04.2026</a:t>
+              <a:t>30.04.2026</a:t>
             </a:fld>
             <a:endParaRPr lang="ru-RU">
               <a:solidFill>
@@ -2969,7 +2969,7 @@
                 </a:solidFill>
               </a:rPr>
               <a:pPr/>
-              <a:t>27.04.2026</a:t>
+              <a:t>30.04.2026</a:t>
             </a:fld>
             <a:endParaRPr lang="ru-RU">
               <a:solidFill>
@@ -3275,7 +3275,7 @@
                 </a:solidFill>
               </a:rPr>
               <a:pPr/>
-              <a:t>27.04.2026</a:t>
+              <a:t>30.04.2026</a:t>
             </a:fld>
             <a:endParaRPr lang="ru-RU">
               <a:solidFill>
@@ -3650,7 +3650,7 @@
                 </a:solidFill>
               </a:rPr>
               <a:pPr/>
-              <a:t>27.04.2026</a:t>
+              <a:t>30.04.2026</a:t>
             </a:fld>
             <a:endParaRPr lang="ru-RU">
               <a:solidFill>
@@ -3961,7 +3961,7 @@
                 </a:solidFill>
               </a:rPr>
               <a:pPr/>
-              <a:t>27.04.2026</a:t>
+              <a:t>30.04.2026</a:t>
             </a:fld>
             <a:endParaRPr lang="ru-RU">
               <a:solidFill>
@@ -4334,7 +4334,7 @@
                 </a:solidFill>
               </a:rPr>
               <a:pPr/>
-              <a:t>27.04.2026</a:t>
+              <a:t>30.04.2026</a:t>
             </a:fld>
             <a:endParaRPr lang="ru-RU">
               <a:solidFill>
@@ -4645,7 +4645,7 @@
                 </a:solidFill>
               </a:rPr>
               <a:pPr/>
-              <a:t>27.04.2026</a:t>
+              <a:t>30.04.2026</a:t>
             </a:fld>
             <a:endParaRPr lang="ru-RU">
               <a:solidFill>
@@ -5007,7 +5007,7 @@
                 </a:solidFill>
               </a:rPr>
               <a:pPr/>
-              <a:t>27.04.2026</a:t>
+              <a:t>30.04.2026</a:t>
             </a:fld>
             <a:endParaRPr lang="ru-RU">
               <a:solidFill>
@@ -5508,7 +5508,7 @@
                 </a:solidFill>
               </a:rPr>
               <a:pPr/>
-              <a:t>27.04.2026</a:t>
+              <a:t>30.04.2026</a:t>
             </a:fld>
             <a:endParaRPr lang="ru-RU">
               <a:solidFill>
@@ -5757,7 +5757,7 @@
                 </a:solidFill>
               </a:rPr>
               <a:pPr/>
-              <a:t>27.04.2026</a:t>
+              <a:t>30.04.2026</a:t>
             </a:fld>
             <a:endParaRPr lang="ru-RU">
               <a:solidFill>
@@ -5978,7 +5978,7 @@
                 </a:solidFill>
               </a:rPr>
               <a:pPr/>
-              <a:t>27.04.2026</a:t>
+              <a:t>30.04.2026</a:t>
             </a:fld>
             <a:endParaRPr lang="ru-RU">
               <a:solidFill>
@@ -6355,7 +6355,7 @@
                 </a:solidFill>
               </a:rPr>
               <a:pPr/>
-              <a:t>27.04.2026</a:t>
+              <a:t>30.04.2026</a:t>
             </a:fld>
             <a:endParaRPr lang="ru-RU">
               <a:solidFill>
@@ -6744,7 +6744,7 @@
                 </a:solidFill>
               </a:rPr>
               <a:pPr/>
-              <a:t>27.04.2026</a:t>
+              <a:t>30.04.2026</a:t>
             </a:fld>
             <a:endParaRPr lang="ru-RU">
               <a:solidFill>
@@ -7127,7 +7127,7 @@
                 </a:solidFill>
               </a:rPr>
               <a:pPr defTabSz="1794922"/>
-              <a:t>27.04.2026</a:t>
+              <a:t>30.04.2026</a:t>
             </a:fld>
             <a:endParaRPr lang="ru-RU">
               <a:solidFill>
@@ -7563,7 +7563,7 @@
                 </a:solidFill>
               </a:rPr>
               <a:pPr defTabSz="1794922"/>
-              <a:t>27.04.2026</a:t>
+              <a:t>30.04.2026</a:t>
             </a:fld>
             <a:endParaRPr lang="ru-RU">
               <a:solidFill>
@@ -7934,7 +7934,7 @@
                 </a:solidFill>
               </a:rPr>
               <a:pPr defTabSz="1794922"/>
-              <a:t>27.04.2026</a:t>
+              <a:t>30.04.2026</a:t>
             </a:fld>
             <a:endParaRPr lang="ru-RU">
               <a:solidFill>
@@ -8289,7 +8289,7 @@
                 </a:solidFill>
               </a:rPr>
               <a:pPr defTabSz="1794922"/>
-              <a:t>27.04.2026</a:t>
+              <a:t>30.04.2026</a:t>
             </a:fld>
             <a:endParaRPr lang="ru-RU">
               <a:solidFill>
@@ -8733,7 +8733,7 @@
                 </a:solidFill>
               </a:rPr>
               <a:pPr/>
-              <a:t>27.04.2026</a:t>
+              <a:t>30.04.2026</a:t>
             </a:fld>
             <a:endParaRPr lang="ru-RU">
               <a:solidFill>
@@ -9098,7 +9098,7 @@
                 </a:solidFill>
               </a:rPr>
               <a:pPr defTabSz="1794922"/>
-              <a:t>27.04.2026</a:t>
+              <a:t>30.04.2026</a:t>
             </a:fld>
             <a:endParaRPr lang="ru-RU">
               <a:solidFill>
@@ -9389,7 +9389,7 @@
                 </a:solidFill>
               </a:rPr>
               <a:pPr/>
-              <a:t>27.04.2026</a:t>
+              <a:t>30.04.2026</a:t>
             </a:fld>
             <a:endParaRPr lang="ru-RU">
               <a:solidFill>
@@ -9695,7 +9695,7 @@
                 </a:solidFill>
               </a:rPr>
               <a:pPr/>
-              <a:t>27.04.2026</a:t>
+              <a:t>30.04.2026</a:t>
             </a:fld>
             <a:endParaRPr lang="ru-RU">
               <a:solidFill>
@@ -10057,7 +10057,7 @@
                 </a:solidFill>
               </a:rPr>
               <a:pPr/>
-              <a:t>27.04.2026</a:t>
+              <a:t>30.04.2026</a:t>
             </a:fld>
             <a:endParaRPr lang="ru-RU">
               <a:solidFill>
@@ -10558,7 +10558,7 @@
                 </a:solidFill>
               </a:rPr>
               <a:pPr/>
-              <a:t>27.04.2026</a:t>
+              <a:t>30.04.2026</a:t>
             </a:fld>
             <a:endParaRPr lang="ru-RU">
               <a:solidFill>
@@ -10807,7 +10807,7 @@
                 </a:solidFill>
               </a:rPr>
               <a:pPr/>
-              <a:t>27.04.2026</a:t>
+              <a:t>30.04.2026</a:t>
             </a:fld>
             <a:endParaRPr lang="ru-RU">
               <a:solidFill>
@@ -11028,7 +11028,7 @@
                 </a:solidFill>
               </a:rPr>
               <a:pPr/>
-              <a:t>27.04.2026</a:t>
+              <a:t>30.04.2026</a:t>
             </a:fld>
             <a:endParaRPr lang="ru-RU">
               <a:solidFill>
@@ -11405,7 +11405,7 @@
                 </a:solidFill>
               </a:rPr>
               <a:pPr/>
-              <a:t>27.04.2026</a:t>
+              <a:t>30.04.2026</a:t>
             </a:fld>
             <a:endParaRPr lang="ru-RU">
               <a:solidFill>
@@ -11794,7 +11794,7 @@
                 </a:solidFill>
               </a:rPr>
               <a:pPr/>
-              <a:t>27.04.2026</a:t>
+              <a:t>30.04.2026</a:t>
             </a:fld>
             <a:endParaRPr lang="ru-RU">
               <a:solidFill>
@@ -13956,7 +13956,7 @@
                 </a:solidFill>
               </a:rPr>
               <a:pPr defTabSz="1794047"/>
-              <a:t>27.04.2026</a:t>
+              <a:t>30.04.2026</a:t>
             </a:fld>
             <a:endParaRPr lang="ru-RU">
               <a:solidFill>
@@ -16473,7 +16473,7 @@
                 </a:solidFill>
               </a:rPr>
               <a:pPr defTabSz="1794922"/>
-              <a:t>27.04.2026</a:t>
+              <a:t>30.04.2026</a:t>
             </a:fld>
             <a:endParaRPr lang="ru-RU">
               <a:solidFill>
@@ -18029,7 +18029,7 @@
                 <a:effectLst/>
                 <a:latin typeface="quote-cjk-patch"/>
               </a:rPr>
-              <a:t>Реализовать веб-интерфейс с графиком, тёмной темой и экспортом данных</a:t>
+              <a:t>Реализовать веб-интерфейс с графиком, разными темами и экспортом данных</a:t>
             </a:r>
           </a:p>
           <a:p>
@@ -19072,7 +19072,7 @@
         <p:spPr>
           <a:xfrm>
             <a:off x="1060450" y="1920875"/>
-            <a:ext cx="18821392" cy="9694843"/>
+            <a:ext cx="18821392" cy="9571732"/>
           </a:xfrm>
           <a:prstGeom prst="rect">
             <a:avLst/>
@@ -19096,7 +19096,7 @@
                 <a:effectLst/>
                 <a:latin typeface="quote-cjk-patch"/>
               </a:rPr>
-              <a:t>Запись настроения с оценкой, заметкой и тегами</a:t>
+              <a:t>Запись настроения с оценкой, заметкой, тегами и фото</a:t>
             </a:r>
           </a:p>
           <a:p>
@@ -19112,8 +19112,24 @@
                 <a:effectLst/>
                 <a:latin typeface="quote-cjk-patch"/>
               </a:rPr>
-              <a:t>Просмотр настроения за сегодня и за неделю</a:t>
-            </a:r>
+              <a:t>Просмотр  и изменение настроения за </a:t>
+            </a:r>
+            <a:r>
+              <a:rPr lang="ru-RU" sz="2800" dirty="0">
+                <a:solidFill>
+                  <a:srgbClr val="0F1115"/>
+                </a:solidFill>
+                <a:latin typeface="quote-cjk-patch"/>
+              </a:rPr>
+              <a:t>любой день</a:t>
+            </a:r>
+            <a:endParaRPr lang="ru-RU" sz="2800" b="0" i="0" dirty="0">
+              <a:solidFill>
+                <a:srgbClr val="0F1115"/>
+              </a:solidFill>
+              <a:effectLst/>
+              <a:latin typeface="quote-cjk-patch"/>
+            </a:endParaRPr>
           </a:p>
           <a:p>
             <a:pPr algn="l">
@@ -19144,39 +19160,7 @@
                 <a:effectLst/>
                 <a:latin typeface="quote-cjk-patch"/>
               </a:rPr>
-              <a:t>Экспорт всей истории в CSV (можно открыть в Excel)</a:t>
-            </a:r>
-          </a:p>
-          <a:p>
-            <a:pPr algn="l">
-              <a:buFont typeface="Arial" panose="020B0604020202020204" pitchFamily="34" charset="0"/>
-              <a:buChar char="•"/>
-            </a:pPr>
-            <a:r>
-              <a:rPr lang="ru-RU" sz="2800" b="0" i="0" dirty="0">
-                <a:solidFill>
-                  <a:srgbClr val="0F1115"/>
-                </a:solidFill>
-                <a:effectLst/>
-                <a:latin typeface="quote-cjk-patch"/>
-              </a:rPr>
-              <a:t>Удаление записей с подтверждением</a:t>
-            </a:r>
-          </a:p>
-          <a:p>
-            <a:pPr algn="l">
-              <a:buFont typeface="Arial" panose="020B0604020202020204" pitchFamily="34" charset="0"/>
-              <a:buChar char="•"/>
-            </a:pPr>
-            <a:r>
-              <a:rPr lang="ru-RU" sz="2800" b="0" i="0" dirty="0">
-                <a:solidFill>
-                  <a:srgbClr val="0F1115"/>
-                </a:solidFill>
-                <a:effectLst/>
-                <a:latin typeface="quote-cjk-patch"/>
-              </a:rPr>
-              <a:t>Тёмная / светлая тема интерфейса</a:t>
+              <a:t>4 темы интерфейса на выбор (в том числе тёмная)</a:t>
             </a:r>
           </a:p>
           <a:p>
@@ -19328,6 +19312,19 @@
               <a:buFont typeface="Arial" panose="020B0604020202020204" pitchFamily="34" charset="0"/>
               <a:buChar char="•"/>
             </a:pPr>
+            <a:endParaRPr lang="en-US" sz="2400" b="0" i="0" dirty="0">
+              <a:solidFill>
+                <a:srgbClr val="0F1115"/>
+              </a:solidFill>
+              <a:effectLst/>
+              <a:latin typeface="quote-cjk-patch"/>
+            </a:endParaRPr>
+          </a:p>
+          <a:p>
+            <a:pPr algn="l">
+              <a:buFont typeface="Arial" panose="020B0604020202020204" pitchFamily="34" charset="0"/>
+              <a:buChar char="•"/>
+            </a:pPr>
             <a:endParaRPr lang="ru-RU" sz="2400" b="0" i="0" dirty="0">
               <a:solidFill>
                 <a:srgbClr val="0F1115"/>
@@ -19346,6 +19343,15 @@
             </a:endParaRPr>
           </a:p>
           <a:p>
+            <a:pPr algn="l"/>
+            <a:endParaRPr lang="ru-RU" sz="2400" dirty="0">
+              <a:solidFill>
+                <a:srgbClr val="0F1115"/>
+              </a:solidFill>
+              <a:latin typeface="quote-cjk-patch"/>
+            </a:endParaRPr>
+          </a:p>
+          <a:p>
             <a:pPr algn="r">
               <a:buFont typeface="Arial" panose="020B0604020202020204" pitchFamily="34" charset="0"/>
               <a:buChar char="•"/>
@@ -19374,7 +19380,7 @@
                 <a:effectLst/>
                 <a:latin typeface="quote-cjk-patch"/>
               </a:rPr>
-              <a:t>Анализ тегов: «ты чаще грустишь по понедельникам»</a:t>
+              <a:t>Календарь настроений с цветовой индикацией дней</a:t>
             </a:r>
           </a:p>
           <a:p>
@@ -19390,8 +19396,15 @@
                 <a:effectLst/>
                 <a:latin typeface="quote-cjk-patch"/>
               </a:rPr>
-              <a:t>Календарь настроений с цветовой индикацией дней</a:t>
-            </a:r>
+              <a:t>Правила для поддержки и всплывающие уведомления в браузере</a:t>
+            </a:r>
+            <a:endParaRPr lang="en-US" sz="2800" b="0" i="0" dirty="0">
+              <a:solidFill>
+                <a:srgbClr val="0F1115"/>
+              </a:solidFill>
+              <a:effectLst/>
+              <a:latin typeface="quote-cjk-patch"/>
+            </a:endParaRPr>
           </a:p>
           <a:p>
             <a:pPr algn="r">
@@ -19399,15 +19412,21 @@
               <a:buChar char="•"/>
             </a:pPr>
             <a:r>
-              <a:rPr lang="ru-RU" sz="2800" b="0" i="0" dirty="0">
+              <a:rPr lang="ru-RU" sz="2800" dirty="0">
                 <a:solidFill>
                   <a:srgbClr val="0F1115"/>
                 </a:solidFill>
-                <a:effectLst/>
                 <a:latin typeface="quote-cjk-patch"/>
               </a:rPr>
-              <a:t>Возможность прикреплять фото к записям</a:t>
-            </a:r>
+              <a:t>Анализ тегов, общей статистики и сравнение с предыдущим месяцем</a:t>
+            </a:r>
+            <a:endParaRPr lang="ru-RU" sz="2800" b="0" i="0" dirty="0">
+              <a:solidFill>
+                <a:srgbClr val="0F1115"/>
+              </a:solidFill>
+              <a:effectLst/>
+              <a:latin typeface="quote-cjk-patch"/>
+            </a:endParaRPr>
           </a:p>
           <a:p>
             <a:pPr algn="r">
@@ -19728,7 +19747,7 @@
         </p:blipFill>
         <p:spPr bwMode="auto">
           <a:xfrm>
-            <a:off x="11042650" y="1463675"/>
+            <a:off x="11271250" y="1463675"/>
             <a:ext cx="8077200" cy="7688198"/>
           </a:xfrm>
           <a:prstGeom prst="rect">
@@ -19775,8 +19794,8 @@
         </p:blipFill>
         <p:spPr bwMode="auto">
           <a:xfrm>
-            <a:off x="1517650" y="5502275"/>
-            <a:ext cx="6172200" cy="5555424"/>
+            <a:off x="1212850" y="4756474"/>
+            <a:ext cx="6858000" cy="6088824"/>
           </a:xfrm>
           <a:prstGeom prst="rect">
             <a:avLst/>
@@ -21374,10 +21393,10 @@
       </p:sp>
       <p:pic>
         <p:nvPicPr>
-          <p:cNvPr id="3" name="Рисунок 2" descr="Изображение выглядит как текст, снимок экрана, Операционная система, программное обеспечение&#10;&#10;Контент, сгенерированный ИИ, может содержать ошибки.">
+          <p:cNvPr id="8" name="Рисунок 7" descr="Изображение выглядит как текст, снимок экрана, число, Шрифт&#10;&#10;Контент, сгенерированный ИИ, может содержать ошибки.">
             <a:extLst>
               <a:ext uri="{FF2B5EF4-FFF2-40B4-BE49-F238E27FC236}">
-                <a16:creationId xmlns:a16="http://schemas.microsoft.com/office/drawing/2014/main" id="{CDE6B2B1-93D3-48BA-3294-709108347F5A}"/>
+                <a16:creationId xmlns:a16="http://schemas.microsoft.com/office/drawing/2014/main" id="{A9A7F7D1-FB03-A73E-D565-6C46B40CC352}"/>
               </a:ext>
             </a:extLst>
           </p:cNvPr>
@@ -21400,8 +21419,8 @@
         </p:blipFill>
         <p:spPr>
           <a:xfrm>
-            <a:off x="298451" y="1249511"/>
-            <a:ext cx="10286999" cy="9753600"/>
+            <a:off x="298451" y="1235075"/>
+            <a:ext cx="9753599" cy="9982200"/>
           </a:xfrm>
           <a:prstGeom prst="rect">
             <a:avLst/>
@@ -21410,10 +21429,10 @@
       </p:pic>
       <p:pic>
         <p:nvPicPr>
-          <p:cNvPr id="9" name="Рисунок 8" descr="Изображение выглядит как текст, снимок экрана, Шрифт, программное обеспечение&#10;&#10;Контент, сгенерированный ИИ, может содержать ошибки.">
+          <p:cNvPr id="11" name="Рисунок 10" descr="Изображение выглядит как текст, снимок экрана, число, программное обеспечение&#10;&#10;Контент, сгенерированный ИИ, может содержать ошибки.">
             <a:extLst>
               <a:ext uri="{FF2B5EF4-FFF2-40B4-BE49-F238E27FC236}">
-                <a16:creationId xmlns:a16="http://schemas.microsoft.com/office/drawing/2014/main" id="{5860F21A-CE63-4FD2-7920-0DC9E0676397}"/>
+                <a16:creationId xmlns:a16="http://schemas.microsoft.com/office/drawing/2014/main" id="{59223939-F4BA-E60A-E6A2-338D8910E395}"/>
               </a:ext>
             </a:extLst>
           </p:cNvPr>
@@ -21436,8 +21455,8 @@
         </p:blipFill>
         <p:spPr>
           <a:xfrm>
-            <a:off x="10814050" y="1249511"/>
-            <a:ext cx="9117281" cy="9823716"/>
+            <a:off x="10204450" y="1235075"/>
+            <a:ext cx="9753600" cy="9904721"/>
           </a:xfrm>
           <a:prstGeom prst="rect">
             <a:avLst/>
@@ -21806,10 +21825,10 @@
       </p:sp>
       <p:pic>
         <p:nvPicPr>
-          <p:cNvPr id="3" name="Рисунок 2" descr="Изображение выглядит как текст, снимок экрана, Шрифт, число&#10;&#10;Контент, сгенерированный ИИ, может содержать ошибки.">
+          <p:cNvPr id="11" name="Рисунок 10" descr="Изображение выглядит как текст, снимок экрана, Шрифт, дизайн&#10;&#10;Контент, сгенерированный ИИ, может содержать ошибки.">
             <a:extLst>
               <a:ext uri="{FF2B5EF4-FFF2-40B4-BE49-F238E27FC236}">
-                <a16:creationId xmlns:a16="http://schemas.microsoft.com/office/drawing/2014/main" id="{AE82E16C-E69C-641A-4B6C-0CA33E428137}"/>
+                <a16:creationId xmlns:a16="http://schemas.microsoft.com/office/drawing/2014/main" id="{37FF75D0-8C0F-AD7C-DAA9-340C8A282636}"/>
               </a:ext>
             </a:extLst>
           </p:cNvPr>
@@ -21832,8 +21851,8 @@
         </p:blipFill>
         <p:spPr>
           <a:xfrm>
-            <a:off x="298451" y="1208227"/>
-            <a:ext cx="8991599" cy="9920351"/>
+            <a:off x="9671050" y="1208227"/>
+            <a:ext cx="10287000" cy="9856648"/>
           </a:xfrm>
           <a:prstGeom prst="rect">
             <a:avLst/>
@@ -21842,10 +21861,10 @@
       </p:pic>
       <p:pic>
         <p:nvPicPr>
-          <p:cNvPr id="9" name="Рисунок 8" descr="Изображение выглядит как текст, снимок экрана, График, программное обеспечение&#10;&#10;Контент, сгенерированный ИИ, может содержать ошибки.">
+          <p:cNvPr id="13" name="Рисунок 12">
             <a:extLst>
               <a:ext uri="{FF2B5EF4-FFF2-40B4-BE49-F238E27FC236}">
-                <a16:creationId xmlns:a16="http://schemas.microsoft.com/office/drawing/2014/main" id="{17C21F5C-95EB-ED41-58DC-BA718F186849}"/>
+                <a16:creationId xmlns:a16="http://schemas.microsoft.com/office/drawing/2014/main" id="{5FB722DD-9162-9219-DB39-05B635809BBD}"/>
               </a:ext>
             </a:extLst>
           </p:cNvPr>
@@ -21855,21 +21874,15 @@
           <p:nvPr/>
         </p:nvPicPr>
         <p:blipFill>
-          <a:blip r:embed="rId3">
-            <a:extLst>
-              <a:ext uri="{28A0092B-C50C-407E-A947-70E740481C1C}">
-                <a14:useLocalDpi xmlns:a14="http://schemas.microsoft.com/office/drawing/2010/main" val="0"/>
-              </a:ext>
-            </a:extLst>
-          </a:blip>
+          <a:blip r:embed="rId3"/>
           <a:stretch>
             <a:fillRect/>
           </a:stretch>
         </p:blipFill>
         <p:spPr>
           <a:xfrm>
-            <a:off x="9594850" y="1208227"/>
-            <a:ext cx="10422240" cy="9856648"/>
+            <a:off x="146050" y="1175639"/>
+            <a:ext cx="9372600" cy="9856648"/>
           </a:xfrm>
           <a:prstGeom prst="rect">
             <a:avLst/>
